--- a/ReBridge_AI공모전용/Planning/꿈드림_의견요청/검고담임_꿈드림센터_의견요청.pptx
+++ b/ReBridge_AI공모전용/Planning/꿈드림_의견요청/검고담임_꿈드림센터_의견요청.pptx
@@ -4482,7 +4482,7 @@
                 <a:ea typeface="맑은 고딕" pitchFamily="34" charset="-122"/>
                 <a:cs typeface="맑은 고딕" pitchFamily="34" charset="-120"/>
               </a:rPr>
-              <a:t>실무자 선생님께</a:t>
+              <a:t>기능이 쓸모가 있는지</a:t>
             </a:r>
             <a:endParaRPr lang="en-US" sz="1600" dirty="0"/>
           </a:p>
@@ -4528,7 +4528,7 @@
                 <a:ea typeface="맑은 고딕" pitchFamily="34" charset="-122"/>
                 <a:cs typeface="맑은 고딕" pitchFamily="34" charset="-120"/>
               </a:rPr>
-              <a:t>센터에서 아이들이 가장 자주 묻는 입시 질문은 무엇인가요?</a:t>
+              <a:t>넣어 둔 기능 중 현장에서 실제로 쓰일 것 같은 것은 무엇인가요?</a:t>
             </a:r>
             <a:endParaRPr lang="en-US" sz="1250" dirty="0"/>
           </a:p>
@@ -4552,7 +4552,7 @@
                 <a:ea typeface="맑은 고딕" pitchFamily="34" charset="-122"/>
                 <a:cs typeface="맑은 고딕" pitchFamily="34" charset="-120"/>
               </a:rPr>
-              <a:t>이 앱을 센터에서 쓰신다면 어떤 방식일까요? 아이 혼자 보게 할지, 상담하며 같이 볼지.</a:t>
+              <a:t>반대로 "이건 없어도 되겠다" 싶은 기능이 있나요?</a:t>
             </a:r>
             <a:endParaRPr lang="en-US" sz="1250" dirty="0"/>
           </a:p>
@@ -4576,10 +4576,119 @@
                 <a:ea typeface="맑은 고딕" pitchFamily="34" charset="-122"/>
                 <a:cs typeface="맑은 고딕" pitchFamily="34" charset="-120"/>
               </a:rPr>
-              <a:t>쪽지 기능은 도움이 될까요, 부담이 될까요?</a:t>
+              <a:t>아이들이 앱을 계속 쓰게 하려면 무엇이 더 있어야 할까요?</a:t>
             </a:r>
             <a:endParaRPr lang="en-US" sz="1250" dirty="0"/>
           </a:p>
+          <a:p>
+            <a:pPr marL="342900" indent="-342900">
+              <a:lnSpc>
+                <a:spcPts val="1900"/>
+              </a:lnSpc>
+              <a:buSzPct val="100000"/>
+              <a:buChar char="•"/>
+            </a:pPr>
+            <a:r>
+              <a:rPr lang="en-US" sz="1250" dirty="0">
+                <a:solidFill>
+                  <a:srgbClr val="1A1D21"/>
+                </a:solidFill>
+                <a:latin typeface="맑은 고딕" pitchFamily="34" charset="0"/>
+                <a:ea typeface="맑은 고딕" pitchFamily="34" charset="-122"/>
+                <a:cs typeface="맑은 고딕" pitchFamily="34" charset="-120"/>
+              </a:rPr>
+              <a:t>센터에서 아이들이 가장 자주 묻는 입시 질문은 무엇인가요?</a:t>
+            </a:r>
+            <a:endParaRPr lang="en-US" sz="1250" dirty="0"/>
+          </a:p>
+        </p:txBody>
+      </p:sp>
+      <p:sp>
+        <p:nvSpPr>
+          <p:cNvPr id="7" name="Shape 5"/>
+          <p:cNvSpPr/>
+          <p:nvPr/>
+        </p:nvSpPr>
+        <p:spPr>
+          <a:xfrm>
+            <a:off x="6263640" y="1783080"/>
+            <a:ext cx="5212080" cy="3566160"/>
+          </a:xfrm>
+          <a:prstGeom prst="roundRect">
+            <a:avLst>
+              <a:gd name="adj" fmla="val 2564"/>
+            </a:avLst>
+          </a:prstGeom>
+          <a:solidFill>
+            <a:srgbClr val="FFFFFF"/>
+          </a:solidFill>
+          <a:ln w="19050">
+            <a:solidFill>
+              <a:srgbClr val="F2C14E"/>
+            </a:solidFill>
+            <a:prstDash val="solid"/>
+          </a:ln>
+        </p:spPr>
+      </p:sp>
+      <p:sp>
+        <p:nvSpPr>
+          <p:cNvPr id="8" name="Text 6"/>
+          <p:cNvSpPr txBox="1"/>
+          <p:nvPr/>
+        </p:nvSpPr>
+        <p:spPr>
+          <a:xfrm>
+            <a:off x="6537960" y="1965960"/>
+            <a:ext cx="4663440" cy="329184"/>
+          </a:xfrm>
+          <a:prstGeom prst="rect">
+            <a:avLst/>
+          </a:prstGeom>
+          <a:noFill/>
+          <a:ln/>
+        </p:spPr>
+        <p:txBody>
+          <a:bodyPr wrap="square" lIns="0" tIns="0" rIns="0" bIns="0" rtlCol="0" anchor="ctr"/>
+          <a:lstStyle/>
+          <a:p>
+            <a:pPr indent="0" marL="0">
+              <a:buNone/>
+            </a:pPr>
+            <a:r>
+              <a:rPr lang="en-US" sz="1600" b="1" dirty="0">
+                <a:solidFill>
+                  <a:srgbClr val="B45309"/>
+                </a:solidFill>
+                <a:latin typeface="맑은 고딕" pitchFamily="34" charset="0"/>
+                <a:ea typeface="맑은 고딕" pitchFamily="34" charset="-122"/>
+                <a:cs typeface="맑은 고딕" pitchFamily="34" charset="-120"/>
+              </a:rPr>
+              <a:t>현장에서 쓰인다면</a:t>
+            </a:r>
+            <a:endParaRPr lang="en-US" sz="1600" dirty="0"/>
+          </a:p>
+        </p:txBody>
+      </p:sp>
+      <p:sp>
+        <p:nvSpPr>
+          <p:cNvPr id="9" name="Text 7"/>
+          <p:cNvSpPr txBox="1"/>
+          <p:nvPr/>
+        </p:nvSpPr>
+        <p:spPr>
+          <a:xfrm>
+            <a:off x="6537960" y="2395728"/>
+            <a:ext cx="4663440" cy="2743200"/>
+          </a:xfrm>
+          <a:prstGeom prst="rect">
+            <a:avLst/>
+          </a:prstGeom>
+          <a:noFill/>
+          <a:ln/>
+        </p:spPr>
+        <p:txBody>
+          <a:bodyPr wrap="square" lIns="0" tIns="0" rIns="0" bIns="0" rtlCol="0" anchor="ctr"/>
+          <a:lstStyle/>
           <a:p>
             <a:pPr marL="342900" indent="-342900">
               <a:lnSpc>
@@ -4600,119 +4709,10 @@
                 <a:ea typeface="맑은 고딕" pitchFamily="34" charset="-122"/>
                 <a:cs typeface="맑은 고딕" pitchFamily="34" charset="-120"/>
               </a:rPr>
-              <a:t>"확인 필요"가 많은 것이 신뢰를 얻을까요, 잃을까요?</a:t>
+              <a:t>센터에서 쓰신다면 어떤 방식일까요? 아이 혼자 보게 할지, 상담하며 같이 볼지.</a:t>
             </a:r>
             <a:endParaRPr lang="en-US" sz="1250" dirty="0"/>
           </a:p>
-          <a:p>
-            <a:pPr marL="342900" indent="-342900">
-              <a:lnSpc>
-                <a:spcPts val="1900"/>
-              </a:lnSpc>
-              <a:buSzPct val="100000"/>
-              <a:buChar char="•"/>
-            </a:pPr>
-            <a:r>
-              <a:rPr lang="en-US" sz="1250" dirty="0">
-                <a:solidFill>
-                  <a:srgbClr val="1A1D21"/>
-                </a:solidFill>
-                <a:latin typeface="맑은 고딕" pitchFamily="34" charset="0"/>
-                <a:ea typeface="맑은 고딕" pitchFamily="34" charset="-122"/>
-                <a:cs typeface="맑은 고딕" pitchFamily="34" charset="-120"/>
-              </a:rPr>
-              <a:t>센터 정보 222곳 중 틀린 곳이 있을까요?</a:t>
-            </a:r>
-            <a:endParaRPr lang="en-US" sz="1250" dirty="0"/>
-          </a:p>
-        </p:txBody>
-      </p:sp>
-      <p:sp>
-        <p:nvSpPr>
-          <p:cNvPr id="7" name="Shape 5"/>
-          <p:cNvSpPr/>
-          <p:nvPr/>
-        </p:nvSpPr>
-        <p:spPr>
-          <a:xfrm>
-            <a:off x="6263640" y="1783080"/>
-            <a:ext cx="5212080" cy="3566160"/>
-          </a:xfrm>
-          <a:prstGeom prst="roundRect">
-            <a:avLst>
-              <a:gd name="adj" fmla="val 2564"/>
-            </a:avLst>
-          </a:prstGeom>
-          <a:solidFill>
-            <a:srgbClr val="FFFFFF"/>
-          </a:solidFill>
-          <a:ln w="19050">
-            <a:solidFill>
-              <a:srgbClr val="F2C14E"/>
-            </a:solidFill>
-            <a:prstDash val="solid"/>
-          </a:ln>
-        </p:spPr>
-      </p:sp>
-      <p:sp>
-        <p:nvSpPr>
-          <p:cNvPr id="8" name="Text 6"/>
-          <p:cNvSpPr txBox="1"/>
-          <p:nvPr/>
-        </p:nvSpPr>
-        <p:spPr>
-          <a:xfrm>
-            <a:off x="6537960" y="1965960"/>
-            <a:ext cx="4663440" cy="329184"/>
-          </a:xfrm>
-          <a:prstGeom prst="rect">
-            <a:avLst/>
-          </a:prstGeom>
-          <a:noFill/>
-          <a:ln/>
-        </p:spPr>
-        <p:txBody>
-          <a:bodyPr wrap="square" lIns="0" tIns="0" rIns="0" bIns="0" rtlCol="0" anchor="ctr"/>
-          <a:lstStyle/>
-          <a:p>
-            <a:pPr indent="0" marL="0">
-              <a:buNone/>
-            </a:pPr>
-            <a:r>
-              <a:rPr lang="en-US" sz="1600" b="1" dirty="0">
-                <a:solidFill>
-                  <a:srgbClr val="B45309"/>
-                </a:solidFill>
-                <a:latin typeface="맑은 고딕" pitchFamily="34" charset="0"/>
-                <a:ea typeface="맑은 고딕" pitchFamily="34" charset="-122"/>
-                <a:cs typeface="맑은 고딕" pitchFamily="34" charset="-120"/>
-              </a:rPr>
-              <a:t>청소년 친구들께</a:t>
-            </a:r>
-            <a:endParaRPr lang="en-US" sz="1600" dirty="0"/>
-          </a:p>
-        </p:txBody>
-      </p:sp>
-      <p:sp>
-        <p:nvSpPr>
-          <p:cNvPr id="9" name="Text 7"/>
-          <p:cNvSpPr txBox="1"/>
-          <p:nvPr/>
-        </p:nvSpPr>
-        <p:spPr>
-          <a:xfrm>
-            <a:off x="6537960" y="2395728"/>
-            <a:ext cx="4663440" cy="2743200"/>
-          </a:xfrm>
-          <a:prstGeom prst="rect">
-            <a:avLst/>
-          </a:prstGeom>
-          <a:noFill/>
-          <a:ln/>
-        </p:spPr>
-        <p:txBody>
-          <a:bodyPr wrap="square" lIns="0" tIns="0" rIns="0" bIns="0" rtlCol="0" anchor="ctr"/>
-          <a:lstStyle/>
           <a:p>
             <a:pPr marL="342900" indent="-342900">
               <a:lnSpc>
@@ -4733,7 +4733,7 @@
                 <a:ea typeface="맑은 고딕" pitchFamily="34" charset="-122"/>
                 <a:cs typeface="맑은 고딕" pitchFamily="34" charset="-120"/>
               </a:rPr>
-              <a:t>처음 켰을 때 뭘 해야 할지 알겠나요?</a:t>
+              <a:t>쪽지 기능은 도움이 될까요, 처리할 일만 늘어날까요?</a:t>
             </a:r>
             <a:endParaRPr lang="en-US" sz="1250" dirty="0"/>
           </a:p>
@@ -4757,55 +4757,7 @@
                 <a:ea typeface="맑은 고딕" pitchFamily="34" charset="-122"/>
                 <a:cs typeface="맑은 고딕" pitchFamily="34" charset="-120"/>
               </a:rPr>
-              <a:t>어떤 기능을 제일 먼저 눌러 보고 싶나요?</a:t>
-            </a:r>
-            <a:endParaRPr lang="en-US" sz="1250" dirty="0"/>
-          </a:p>
-          <a:p>
-            <a:pPr marL="342900" indent="-342900">
-              <a:lnSpc>
-                <a:spcPts val="1900"/>
-              </a:lnSpc>
-              <a:spcAft>
-                <a:spcPts val="800"/>
-              </a:spcAft>
-              <a:buSzPct val="100000"/>
-              <a:buChar char="•"/>
-            </a:pPr>
-            <a:r>
-              <a:rPr lang="en-US" sz="1250" dirty="0">
-                <a:solidFill>
-                  <a:srgbClr val="1A1D21"/>
-                </a:solidFill>
-                <a:latin typeface="맑은 고딕" pitchFamily="34" charset="0"/>
-                <a:ea typeface="맑은 고딕" pitchFamily="34" charset="-122"/>
-                <a:cs typeface="맑은 고딕" pitchFamily="34" charset="-120"/>
-              </a:rPr>
-              <a:t>없어도 될 것 같은 기능이 있나요?</a:t>
-            </a:r>
-            <a:endParaRPr lang="en-US" sz="1250" dirty="0"/>
-          </a:p>
-          <a:p>
-            <a:pPr marL="342900" indent="-342900">
-              <a:lnSpc>
-                <a:spcPts val="1900"/>
-              </a:lnSpc>
-              <a:spcAft>
-                <a:spcPts val="800"/>
-              </a:spcAft>
-              <a:buSzPct val="100000"/>
-              <a:buChar char="•"/>
-            </a:pPr>
-            <a:r>
-              <a:rPr lang="en-US" sz="1250" dirty="0">
-                <a:solidFill>
-                  <a:srgbClr val="1A1D21"/>
-                </a:solidFill>
-                <a:latin typeface="맑은 고딕" pitchFamily="34" charset="0"/>
-                <a:ea typeface="맑은 고딕" pitchFamily="34" charset="-122"/>
-                <a:cs typeface="맑은 고딕" pitchFamily="34" charset="-120"/>
-              </a:rPr>
-              <a:t>"이런 게 있으면 쓸 것 같다" 하는 게 있나요?</a:t>
+              <a:t>"확인 필요"가 자주 뜨는 것이 신뢰를 얻을까요, 잃을까요?</a:t>
             </a:r>
             <a:endParaRPr lang="en-US" sz="1250" dirty="0"/>
           </a:p>
@@ -4826,7 +4778,7 @@
                 <a:ea typeface="맑은 고딕" pitchFamily="34" charset="-122"/>
                 <a:cs typeface="맑은 고딕" pitchFamily="34" charset="-120"/>
               </a:rPr>
-              <a:t>읽다가 무슨 말인지 모르겠던 단어가 있었나요?</a:t>
+              <a:t>센터 정보 222곳 중 틀리거나 빠진 곳이 있을까요?</a:t>
             </a:r>
             <a:endParaRPr lang="en-US" sz="1250" dirty="0"/>
           </a:p>
@@ -6207,7 +6159,7 @@
                 <a:ea typeface="맑은 고딕" pitchFamily="34" charset="-122"/>
                 <a:cs typeface="맑은 고딕" pitchFamily="34" charset="-120"/>
               </a:rPr>
-              <a:t>실무자 선생님 의견과, 가능하다면 센터의 청소년이 직접 느낀 점을 함께 듣고 싶습니다.</a:t>
+              <a:t>현장에서 아이들을 만나 오신 선생님의 눈으로만 봐 주시면 됩니다. 아이들에게 따로 물어보실 필요는 없습니다.</a:t>
             </a:r>
             <a:endParaRPr lang="en-US" sz="1300" dirty="0"/>
           </a:p>
